--- a/applications/2026-10-13_昕力資訊_數據分析師/中文履歷_楊上瑋_昕力資訊.pptx
+++ b/applications/2026-10-13_昕力資訊_數據分析師/中文履歷_楊上瑋_昕力資訊.pptx
@@ -16877,7 +16877,7 @@
                 <a:latin typeface="微軟正黑體" panose="020B0604030504040204" pitchFamily="34" charset="-120"/>
                 <a:ea typeface="微軟正黑體" panose="020B0604030504040204" pitchFamily="34" charset="-120"/>
               </a:rPr>
-              <a:t>中央研究院人文社會研究中心</a:t>
+              <a:t>中研院人文社會科學研究中心</a:t>
             </a:r>
             <a:endParaRPr dirty="0">
               <a:solidFill>
